--- a/06_relazioni_e_parametri/Slides_v3/05_metodo-vqe.pptx
+++ b/06_relazioni_e_parametri/Slides_v3/05_metodo-vqe.pptx
@@ -8,7 +8,7 @@
     <p:notesMasterId r:id="rId3"/>
   </p:notesMasterIdLst>
   <p:sldIdLst>
-    <p:sldId id="265" r:id="rId2"/>
+    <p:sldId id="273" r:id="rId2"/>
   </p:sldIdLst>
   <p:sldSz cx="12192000" cy="6858000"/>
   <p:notesSz cx="6858000" cy="12192000"/>
@@ -714,7 +714,7 @@
               <a:buNone/>
             </a:pPr>
             <a:r>
-              <a:rPr lang="en-US" sz="3800" b="1" dirty="0">
+              <a:rPr lang="en-US" sz="3600" b="1" dirty="0">
                 <a:solidFill>
                   <a:srgbClr val="16233A"/>
                 </a:solidFill>
@@ -725,7 +725,7 @@
               <a:t>Variational Quantum </a:t>
             </a:r>
             <a:r>
-              <a:rPr lang="en-US" sz="3800" b="1" dirty="0" err="1">
+              <a:rPr lang="en-US" sz="3600" b="1" dirty="0" err="1">
                 <a:solidFill>
                   <a:srgbClr val="16233A"/>
                 </a:solidFill>
@@ -736,7 +736,7 @@
               <a:t>Eigensolver</a:t>
             </a:r>
             <a:r>
-              <a:rPr lang="en-US" sz="3800" b="1" dirty="0">
+              <a:rPr lang="en-US" sz="3600" b="1" dirty="0">
                 <a:solidFill>
                   <a:srgbClr val="16233A"/>
                 </a:solidFill>
@@ -746,7 +746,7 @@
               </a:rPr>
               <a:t> (VQE)</a:t>
             </a:r>
-            <a:endParaRPr lang="en-US" sz="3800" dirty="0"/>
+            <a:endParaRPr lang="en-US" sz="3600" dirty="0"/>
           </a:p>
         </p:txBody>
       </p:sp>
@@ -758,7 +758,7 @@
         </p:nvSpPr>
         <p:spPr>
           <a:xfrm>
-            <a:off x="640080" y="1554480"/>
+            <a:off x="667032" y="1457880"/>
             <a:ext cx="10911535" cy="530352"/>
           </a:xfrm>
           <a:prstGeom prst="roundRect">
@@ -787,7 +787,7 @@
         </p:nvSpPr>
         <p:spPr>
           <a:xfrm>
-            <a:off x="586480" y="1554480"/>
+            <a:off x="613432" y="1457880"/>
             <a:ext cx="10965136" cy="530352"/>
           </a:xfrm>
           <a:prstGeom prst="rect">
@@ -804,7 +804,7 @@
               <a:buNone/>
             </a:pPr>
             <a:r>
-              <a:rPr lang="en-US" sz="2100" b="1" dirty="0" err="1">
+              <a:rPr lang="en-US" sz="2100" b="1" i="1" dirty="0" err="1">
                 <a:solidFill>
                   <a:srgbClr val="173A5E"/>
                 </a:solidFill>
@@ -815,7 +815,7 @@
               <a:t>Algoritmo</a:t>
             </a:r>
             <a:r>
-              <a:rPr lang="en-US" sz="2100" b="1" dirty="0">
+              <a:rPr lang="en-US" sz="2100" b="1" i="1" dirty="0">
                 <a:solidFill>
                   <a:srgbClr val="173A5E"/>
                 </a:solidFill>
@@ -826,7 +826,7 @@
               <a:t> </a:t>
             </a:r>
             <a:r>
-              <a:rPr lang="en-US" sz="2100" b="1" dirty="0" err="1">
+              <a:rPr lang="en-US" sz="2100" b="1" i="1" dirty="0" err="1">
                 <a:solidFill>
                   <a:srgbClr val="173A5E"/>
                 </a:solidFill>
@@ -837,7 +837,7 @@
               <a:t>ibrido</a:t>
             </a:r>
             <a:r>
-              <a:rPr lang="en-US" sz="2100" b="1" dirty="0">
+              <a:rPr lang="en-US" sz="2100" b="1" i="1" dirty="0">
                 <a:solidFill>
                   <a:srgbClr val="173A5E"/>
                 </a:solidFill>
@@ -848,7 +848,7 @@
               <a:t> </a:t>
             </a:r>
             <a:r>
-              <a:rPr lang="en-US" sz="2100" b="1" dirty="0" err="1">
+              <a:rPr lang="en-US" sz="2100" b="1" i="1" dirty="0" err="1">
                 <a:solidFill>
                   <a:srgbClr val="173A5E"/>
                 </a:solidFill>
@@ -859,7 +859,7 @@
               <a:t>quantistico</a:t>
             </a:r>
             <a:r>
-              <a:rPr lang="en-US" sz="2100" b="1" dirty="0">
+              <a:rPr lang="en-US" sz="2100" b="1" i="1" dirty="0">
                 <a:solidFill>
                   <a:srgbClr val="173A5E"/>
                 </a:solidFill>
@@ -870,7 +870,7 @@
               <a:t>-classico per </a:t>
             </a:r>
             <a:r>
-              <a:rPr lang="en-US" sz="2100" b="1" dirty="0" err="1">
+              <a:rPr lang="en-US" sz="2100" b="1" i="1" dirty="0" err="1">
                 <a:solidFill>
                   <a:srgbClr val="173A5E"/>
                 </a:solidFill>
@@ -881,7 +881,7 @@
               <a:t>trovare</a:t>
             </a:r>
             <a:r>
-              <a:rPr lang="en-US" sz="2100" b="1" dirty="0">
+              <a:rPr lang="en-US" sz="2100" b="1" i="1" dirty="0">
                 <a:solidFill>
                   <a:srgbClr val="173A5E"/>
                 </a:solidFill>
@@ -892,7 +892,7 @@
               <a:t> lo </a:t>
             </a:r>
             <a:r>
-              <a:rPr lang="en-US" sz="2100" b="1" dirty="0" err="1">
+              <a:rPr lang="en-US" sz="2100" b="1" i="1" dirty="0" err="1">
                 <a:solidFill>
                   <a:srgbClr val="173A5E"/>
                 </a:solidFill>
@@ -903,7 +903,7 @@
               <a:t>stato</a:t>
             </a:r>
             <a:r>
-              <a:rPr lang="en-US" sz="2100" b="1" dirty="0">
+              <a:rPr lang="en-US" sz="2100" b="1" i="1" dirty="0">
                 <a:solidFill>
                   <a:srgbClr val="173A5E"/>
                 </a:solidFill>
@@ -914,7 +914,7 @@
               <a:t> </a:t>
             </a:r>
             <a:r>
-              <a:rPr lang="en-US" sz="2100" b="1" dirty="0" err="1">
+              <a:rPr lang="en-US" sz="2100" b="1" i="1" dirty="0" err="1">
                 <a:solidFill>
                   <a:srgbClr val="173A5E"/>
                 </a:solidFill>
@@ -925,7 +925,7 @@
               <a:t>fondamentale</a:t>
             </a:r>
             <a:r>
-              <a:rPr lang="en-US" sz="2100" b="1" dirty="0">
+              <a:rPr lang="en-US" sz="2100" b="1" i="1" dirty="0">
                 <a:solidFill>
                   <a:srgbClr val="173A5E"/>
                 </a:solidFill>
@@ -936,7 +936,7 @@
               <a:t> di un </a:t>
             </a:r>
             <a:r>
-              <a:rPr lang="en-US" sz="2100" b="1" dirty="0" err="1">
+              <a:rPr lang="en-US" sz="2100" b="1" i="1" dirty="0" err="1">
                 <a:solidFill>
                   <a:srgbClr val="173A5E"/>
                 </a:solidFill>
@@ -947,7 +947,7 @@
               <a:t>sistema</a:t>
             </a:r>
             <a:r>
-              <a:rPr lang="en-US" sz="2100" b="1" dirty="0">
+              <a:rPr lang="en-US" sz="2100" b="1" i="1" dirty="0">
                 <a:solidFill>
                   <a:srgbClr val="173A5E"/>
                 </a:solidFill>
@@ -958,7 +958,7 @@
               <a:t> </a:t>
             </a:r>
             <a:r>
-              <a:rPr lang="en-US" sz="2100" b="1" dirty="0" err="1">
+              <a:rPr lang="en-US" sz="2100" b="1" i="1" dirty="0" err="1">
                 <a:solidFill>
                   <a:srgbClr val="173A5E"/>
                 </a:solidFill>
@@ -968,7 +968,7 @@
               </a:rPr>
               <a:t>Hamiltoniano</a:t>
             </a:r>
-            <a:endParaRPr lang="en-US" sz="2100" dirty="0"/>
+            <a:endParaRPr lang="en-US" sz="2100" i="1" dirty="0"/>
           </a:p>
         </p:txBody>
       </p:sp>
@@ -1487,7 +1487,7 @@
                 <a:avLst/>
               </a:prstGeom>
               <a:blipFill>
-                <a:blip r:embed="rId4"/>
+                <a:blip r:embed="rId3"/>
                 <a:stretch>
                   <a:fillRect/>
                 </a:stretch>
@@ -1591,7 +1591,7 @@
           <p:nvPr/>
         </p:nvPicPr>
         <p:blipFill>
-          <a:blip r:embed="rId5"/>
+          <a:blip r:embed="rId4"/>
           <a:stretch>
             <a:fillRect/>
           </a:stretch>
